--- a/docs/reports/project-status-2026-07-26.pptx
+++ b/docs/reports/project-status-2026-07-26.pptx
@@ -8793,7 +8793,7 @@
                 <a:ea typeface="Calibri" pitchFamily="34" charset="-122"/>
                 <a:cs typeface="Calibri" pitchFamily="34" charset="-120"/>
               </a:rPr>
-              <a:t>口径说明：文件与提交数来自 Git 跟踪记录；健康度为基于仓库证据的定性评分，不代表线上 SLA 或生成成功率。业务指标可后续用占位仪表盘补齐。</a:t>
+              <a:t>口径说明：文件与提交数来自 Git 跟踪记录；健康度为基于仓库证据的定性评分，不代表线上 SLA 或生成成功率。业务运行指标待后续采集补齐。</a:t>
             </a:r>
             <a:endParaRPr lang="en-US" sz="1200" dirty="0"/>
           </a:p>
